--- a/sose2026/gesundheitstechnik/präsentation/Präsentation.pptx
+++ b/sose2026/gesundheitstechnik/präsentation/Präsentation.pptx
@@ -16188,6 +16188,10 @@
             </a:r>
           </a:p>
           <a:p>
+            <a:pPr lvl="1"/>
+            <a:endParaRPr lang="de-DE" dirty="0"/>
+          </a:p>
+          <a:p>
             <a:r>
               <a:rPr lang="de-DE" dirty="0"/>
               <a:t>Benchmark (Stanford „</a:t>
@@ -16209,6 +16213,10 @@
             </a:r>
           </a:p>
           <a:p>
+            <a:pPr lvl="1"/>
+            <a:endParaRPr lang="de-DE" dirty="0"/>
+          </a:p>
+          <a:p>
             <a:r>
               <a:rPr lang="de-DE" dirty="0"/>
               <a:t>Ergebnis</a:t>
@@ -16227,6 +16235,10 @@
               <a:rPr lang="de-DE" dirty="0"/>
               <a:t>F1 = 0,387 (Fachradiologen)</a:t>
             </a:r>
+          </a:p>
+          <a:p>
+            <a:pPr lvl="1"/>
+            <a:endParaRPr lang="de-DE" dirty="0"/>
           </a:p>
           <a:p>
             <a:r>
@@ -16716,6 +16728,9 @@
             <a:endParaRPr lang="de-DE" dirty="0"/>
           </a:p>
           <a:p>
+            <a:endParaRPr lang="de-DE" dirty="0"/>
+          </a:p>
+          <a:p>
             <a:r>
               <a:rPr lang="de-DE" dirty="0"/>
               <a:t>Rollenverteilung in der Diagnostik</a:t>
@@ -16760,6 +16775,10 @@
             </a:r>
           </a:p>
           <a:p>
+            <a:pPr lvl="1"/>
+            <a:endParaRPr lang="de-DE" dirty="0"/>
+          </a:p>
+          <a:p>
             <a:r>
               <a:rPr lang="de-DE" dirty="0"/>
               <a:t>Burnout-Prävention</a:t>
@@ -16811,6 +16830,9 @@
             <a:endParaRPr lang="de-DE" dirty="0"/>
           </a:p>
           <a:p>
+            <a:endParaRPr lang="de-DE" dirty="0"/>
+          </a:p>
+          <a:p>
             <a:r>
               <a:rPr lang="de-DE" dirty="0"/>
               <a:t>Sensitivitätssteigerung</a:t>
@@ -16829,6 +16851,10 @@
               <a:rPr lang="de-DE" dirty="0"/>
               <a:t>Minimierung von Falsch-Negativ-Befunden</a:t>
             </a:r>
+          </a:p>
+          <a:p>
+            <a:pPr lvl="1"/>
+            <a:endParaRPr lang="de-DE" dirty="0"/>
           </a:p>
           <a:p>
             <a:r>
@@ -17095,6 +17121,9 @@
             <a:endParaRPr lang="de-DE" dirty="0"/>
           </a:p>
           <a:p>
+            <a:endParaRPr lang="de-DE" dirty="0"/>
+          </a:p>
+          <a:p>
             <a:r>
               <a:rPr lang="de-DE" dirty="0"/>
               <a:t>DGSVO Art. 9</a:t>
@@ -17108,6 +17137,10 @@
             </a:r>
           </a:p>
           <a:p>
+            <a:pPr lvl="1"/>
+            <a:endParaRPr lang="de-DE" dirty="0"/>
+          </a:p>
+          <a:p>
             <a:r>
               <a:rPr lang="de-DE" dirty="0"/>
               <a:t>Cloud Risiko (US CLOUD Act)</a:t>
@@ -17126,6 +17159,10 @@
               <a:rPr lang="de-DE" dirty="0"/>
               <a:t>Unvereinbar mit EU-Recht</a:t>
             </a:r>
+          </a:p>
+          <a:p>
+            <a:pPr lvl="1"/>
+            <a:endParaRPr lang="de-DE" dirty="0"/>
           </a:p>
           <a:p>
             <a:r>
@@ -17185,6 +17222,9 @@
             <a:endParaRPr lang="de-DE" dirty="0"/>
           </a:p>
           <a:p>
+            <a:endParaRPr lang="de-DE" dirty="0"/>
+          </a:p>
+          <a:p>
             <a:r>
               <a:rPr lang="de-DE" dirty="0"/>
               <a:t>On-</a:t>
@@ -17211,6 +17251,10 @@
               <a:rPr lang="de-DE" dirty="0"/>
               <a:t>Kritische Messgröße: Inferenz-Latenz</a:t>
             </a:r>
+          </a:p>
+          <a:p>
+            <a:pPr lvl="1"/>
+            <a:endParaRPr lang="de-DE" dirty="0"/>
           </a:p>
           <a:p>
             <a:r>
@@ -18040,6 +18084,10 @@
             </a:r>
           </a:p>
           <a:p>
+            <a:pPr lvl="1"/>
+            <a:endParaRPr lang="de-DE" dirty="0"/>
+          </a:p>
+          <a:p>
             <a:r>
               <a:rPr lang="de-DE" dirty="0"/>
               <a:t>Multimodale Modelle</a:t>
@@ -18104,6 +18152,78 @@
           </a:p>
         </p:txBody>
       </p:sp>
+      <p:pic>
+        <p:nvPicPr>
+          <p:cNvPr id="10" name="Grafik 9" descr="Waage der Justitia Silhouette">
+            <a:extLst>
+              <a:ext uri="{FF2B5EF4-FFF2-40B4-BE49-F238E27FC236}">
+                <a16:creationId xmlns:a16="http://schemas.microsoft.com/office/drawing/2014/main" id="{E2383040-2969-7447-5F7F-222BDA494298}"/>
+              </a:ext>
+            </a:extLst>
+          </p:cNvPr>
+          <p:cNvPicPr>
+            <a:picLocks noChangeAspect="1"/>
+          </p:cNvPicPr>
+          <p:nvPr/>
+        </p:nvPicPr>
+        <p:blipFill>
+          <a:blip>
+            <a:extLst>
+              <a:ext uri="{96DAC541-7B7A-43D3-8B79-37D633B846F1}">
+                <asvg:svgBlip xmlns:asvg="http://schemas.microsoft.com/office/drawing/2016/SVG/main" r:embed="rId2"/>
+              </a:ext>
+            </a:extLst>
+          </a:blip>
+          <a:stretch>
+            <a:fillRect/>
+          </a:stretch>
+        </p:blipFill>
+        <p:spPr>
+          <a:xfrm>
+            <a:off x="5626281" y="1223425"/>
+            <a:ext cx="914400" cy="914400"/>
+          </a:xfrm>
+          <a:prstGeom prst="rect">
+            <a:avLst/>
+          </a:prstGeom>
+        </p:spPr>
+      </p:pic>
+      <p:pic>
+        <p:nvPicPr>
+          <p:cNvPr id="12" name="Grafik 11" descr="Jongleur Silhouette">
+            <a:extLst>
+              <a:ext uri="{FF2B5EF4-FFF2-40B4-BE49-F238E27FC236}">
+                <a16:creationId xmlns:a16="http://schemas.microsoft.com/office/drawing/2014/main" id="{A9BA8D4B-FF76-8B86-74F1-8DCF1A6B595C}"/>
+              </a:ext>
+            </a:extLst>
+          </p:cNvPr>
+          <p:cNvPicPr>
+            <a:picLocks noChangeAspect="1"/>
+          </p:cNvPicPr>
+          <p:nvPr/>
+        </p:nvPicPr>
+        <p:blipFill>
+          <a:blip>
+            <a:extLst>
+              <a:ext uri="{96DAC541-7B7A-43D3-8B79-37D633B846F1}">
+                <asvg:svgBlip xmlns:asvg="http://schemas.microsoft.com/office/drawing/2016/SVG/main" r:embed="rId3"/>
+              </a:ext>
+            </a:extLst>
+          </a:blip>
+          <a:stretch>
+            <a:fillRect/>
+          </a:stretch>
+        </p:blipFill>
+        <p:spPr>
+          <a:xfrm>
+            <a:off x="7344000" y="1927371"/>
+            <a:ext cx="914400" cy="914400"/>
+          </a:xfrm>
+          <a:prstGeom prst="rect">
+            <a:avLst/>
+          </a:prstGeom>
+        </p:spPr>
+      </p:pic>
     </p:spTree>
     <p:extLst>
       <p:ext uri="{BB962C8B-B14F-4D97-AF65-F5344CB8AC3E}">
@@ -18253,20 +18373,53 @@
           </a:p>
         </p:txBody>
       </p:sp>
-      <p:sp>
-        <p:nvSpPr>
-          <p:cNvPr id="10" name="Inhaltsplatzhalter 9">
-            <a:extLst>
-              <a:ext uri="{FF2B5EF4-FFF2-40B4-BE49-F238E27FC236}">
-                <a16:creationId xmlns:a16="http://schemas.microsoft.com/office/drawing/2014/main" id="{E740C765-D99A-ED64-1A6D-18D0509D1547}"/>
-              </a:ext>
-            </a:extLst>
-          </p:cNvPr>
-          <p:cNvSpPr>
-            <a:spLocks noGrp="1"/>
-          </p:cNvSpPr>
+      <p:pic>
+        <p:nvPicPr>
+          <p:cNvPr id="6" name="Inhaltsplatzhalter 5">
+            <a:extLst>
+              <a:ext uri="{FF2B5EF4-FFF2-40B4-BE49-F238E27FC236}">
+                <a16:creationId xmlns:a16="http://schemas.microsoft.com/office/drawing/2014/main" id="{2E1A984F-A638-6F41-766E-AB8B776F42E8}"/>
+              </a:ext>
+            </a:extLst>
+          </p:cNvPr>
+          <p:cNvPicPr>
+            <a:picLocks noGrp="1" noChangeAspect="1"/>
+          </p:cNvPicPr>
           <p:nvPr>
             <p:ph idx="1"/>
+          </p:nvPr>
+        </p:nvPicPr>
+        <p:blipFill>
+          <a:blip r:embed="rId2"/>
+          <a:srcRect l="5570" t="5781" r="4186" b="3975"/>
+          <a:stretch>
+            <a:fillRect/>
+          </a:stretch>
+        </p:blipFill>
+        <p:spPr>
+          <a:xfrm>
+            <a:off x="3610132" y="973855"/>
+            <a:ext cx="5504292" cy="5504290"/>
+          </a:xfrm>
+          <a:prstGeom prst="rect">
+            <a:avLst/>
+          </a:prstGeom>
+        </p:spPr>
+      </p:pic>
+      <p:sp>
+        <p:nvSpPr>
+          <p:cNvPr id="12" name="Textplatzhalter 11">
+            <a:extLst>
+              <a:ext uri="{FF2B5EF4-FFF2-40B4-BE49-F238E27FC236}">
+                <a16:creationId xmlns:a16="http://schemas.microsoft.com/office/drawing/2014/main" id="{797E23DB-2F22-0AD5-618A-4618E57882B3}"/>
+              </a:ext>
+            </a:extLst>
+          </p:cNvPr>
+          <p:cNvSpPr>
+            <a:spLocks noGrp="1"/>
+          </p:cNvSpPr>
+          <p:nvPr>
+            <p:ph type="body" sz="quarter" idx="14"/>
           </p:nvPr>
         </p:nvSpPr>
         <p:spPr/>
@@ -18274,32 +18427,10 @@
           <a:bodyPr/>
           <a:lstStyle/>
           <a:p>
-            <a:endParaRPr lang="de-DE"/>
-          </a:p>
-        </p:txBody>
-      </p:sp>
-      <p:sp>
-        <p:nvSpPr>
-          <p:cNvPr id="12" name="Textplatzhalter 11">
-            <a:extLst>
-              <a:ext uri="{FF2B5EF4-FFF2-40B4-BE49-F238E27FC236}">
-                <a16:creationId xmlns:a16="http://schemas.microsoft.com/office/drawing/2014/main" id="{797E23DB-2F22-0AD5-618A-4618E57882B3}"/>
-              </a:ext>
-            </a:extLst>
-          </p:cNvPr>
-          <p:cNvSpPr>
-            <a:spLocks noGrp="1"/>
-          </p:cNvSpPr>
-          <p:nvPr>
-            <p:ph type="body" sz="quarter" idx="14"/>
-          </p:nvPr>
-        </p:nvSpPr>
-        <p:spPr/>
-        <p:txBody>
-          <a:bodyPr/>
-          <a:lstStyle/>
-          <a:p>
-            <a:endParaRPr lang="de-DE"/>
+            <a:r>
+              <a:rPr lang="de-DE" dirty="0"/>
+              <a:t>Link: https://github.com/gbshschmlu/gt-seminar-2026</a:t>
+            </a:r>
           </a:p>
         </p:txBody>
       </p:sp>
@@ -19241,6 +19372,9 @@
             </a:r>
           </a:p>
           <a:p>
+            <a:endParaRPr lang="de-DE" dirty="0"/>
+          </a:p>
+          <a:p>
             <a:r>
               <a:rPr lang="de-DE" dirty="0"/>
               <a:t>Die Probleme in der Medizin</a:t>
@@ -19438,13 +19572,15 @@
         </p:nvPicPr>
         <p:blipFill>
           <a:blip r:embed="rId4"/>
-          <a:srcRect/>
-          <a:stretch/>
+          <a:srcRect t="5160" r="2503"/>
+          <a:stretch>
+            <a:fillRect/>
+          </a:stretch>
         </p:blipFill>
         <p:spPr>
           <a:xfrm>
-            <a:off x="358776" y="1223999"/>
-            <a:ext cx="5724524" cy="2948129"/>
+            <a:off x="274338" y="1223999"/>
+            <a:ext cx="5640086" cy="2825487"/>
           </a:xfrm>
           <a:prstGeom prst="rect">
             <a:avLst/>
@@ -19805,17 +19941,13 @@
             </a:r>
           </a:p>
           <a:p>
+            <a:pPr lvl="1"/>
+            <a:endParaRPr lang="de-DE" dirty="0"/>
+          </a:p>
+          <a:p>
             <a:r>
               <a:rPr lang="de-DE" dirty="0"/>
-              <a:t>Feature </a:t>
-            </a:r>
-            <a:r>
-              <a:rPr lang="de-DE" dirty="0" err="1"/>
-              <a:t>Extraction</a:t>
-            </a:r>
-            <a:r>
-              <a:rPr lang="de-DE" dirty="0"/>
-              <a:t> (Schichten)</a:t>
+              <a:t>Feature Extraktion (Schichten)</a:t>
             </a:r>
           </a:p>
           <a:p>
@@ -20124,6 +20256,10 @@
               <a:rPr lang="de-DE" dirty="0"/>
               <a:t>Datenmangel: Nicht genug Daten für sehr gutes Training</a:t>
             </a:r>
+          </a:p>
+          <a:p>
+            <a:pPr lvl="1"/>
+            <a:endParaRPr lang="de-DE" dirty="0"/>
           </a:p>
           <a:p>
             <a:r>
@@ -20683,6 +20819,9 @@
             <a:endParaRPr lang="de-DE" dirty="0"/>
           </a:p>
           <a:p>
+            <a:endParaRPr lang="de-DE" dirty="0"/>
+          </a:p>
+          <a:p>
             <a:r>
               <a:rPr lang="de-DE" dirty="0"/>
               <a:t>Input</a:t>
@@ -20703,6 +20842,10 @@
             </a:r>
           </a:p>
           <a:p>
+            <a:pPr lvl="1"/>
+            <a:endParaRPr lang="de-DE" dirty="0"/>
+          </a:p>
+          <a:p>
             <a:r>
               <a:rPr lang="de-DE" dirty="0"/>
               <a:t>Klassen</a:t>
@@ -20744,6 +20887,10 @@
             </a:r>
           </a:p>
           <a:p>
+            <a:pPr lvl="1"/>
+            <a:endParaRPr lang="de-DE" dirty="0"/>
+          </a:p>
+          <a:p>
             <a:r>
               <a:rPr lang="de-DE" dirty="0"/>
               <a:t>Output</a:t>
@@ -20808,6 +20955,9 @@
             <a:endParaRPr lang="de-DE" dirty="0"/>
           </a:p>
           <a:p>
+            <a:endParaRPr lang="de-DE" dirty="0"/>
+          </a:p>
+          <a:p>
             <a:r>
               <a:rPr lang="de-DE" dirty="0"/>
               <a:t>Input</a:t>
@@ -20828,6 +20978,10 @@
             </a:r>
           </a:p>
           <a:p>
+            <a:pPr lvl="1"/>
+            <a:endParaRPr lang="de-DE" dirty="0"/>
+          </a:p>
+          <a:p>
             <a:r>
               <a:rPr lang="de-DE" dirty="0"/>
               <a:t>Klassen</a:t>
@@ -20860,6 +21014,10 @@
               <a:rPr lang="de-DE" dirty="0"/>
               <a:t>…</a:t>
             </a:r>
+          </a:p>
+          <a:p>
+            <a:pPr lvl="1"/>
+            <a:endParaRPr lang="de-DE" dirty="0"/>
           </a:p>
           <a:p>
             <a:r>
@@ -22185,27 +22343,6 @@
 </file>
 
 <file path=customXml/item2.xml><?xml version="1.0" encoding="utf-8"?>
-<?mso-contentType ?>
-<FormTemplates xmlns="http://schemas.microsoft.com/sharepoint/v3/contenttype/forms">
-  <Display>DocumentLibraryForm</Display>
-  <Edit>DocumentLibraryForm</Edit>
-  <New>DocumentLibraryForm</New>
-</FormTemplates>
-</file>
-
-<file path=customXml/item3.xml><?xml version="1.0" encoding="utf-8"?>
-<p:properties xmlns:p="http://schemas.microsoft.com/office/2006/metadata/properties" xmlns:xsi="http://www.w3.org/2001/XMLSchema-instance" xmlns:pc="http://schemas.microsoft.com/office/infopath/2007/PartnerControls">
-  <documentManagement>
-    <_dlc_DocId xmlns="a520fe50-23cf-4a2e-8bfc-142b59f95669">FFCHKUDXR3DJ-1374514227-86</_dlc_DocId>
-    <_dlc_DocIdUrl xmlns="a520fe50-23cf-4a2e-8bfc-142b59f95669">
-      <Url>https://grenzebach.sharepoint.com/sites/SP-Dokumentencenter-Test-MBE/_layouts/15/DocIdRedir.aspx?ID=FFCHKUDXR3DJ-1374514227-86</Url>
-      <Description>FFCHKUDXR3DJ-1374514227-86</Description>
-    </_dlc_DocIdUrl>
-  </documentManagement>
-</p:properties>
-</file>
-
-<file path=customXml/item4.xml><?xml version="1.0" encoding="utf-8"?>
 <ct:contentTypeSchema xmlns:ct="http://schemas.microsoft.com/office/2006/metadata/contentType" xmlns:ma="http://schemas.microsoft.com/office/2006/metadata/properties/metaAttributes" ct:_="" ma:_="" ma:contentTypeName="Dokument" ma:contentTypeID="0x010100CEF205FA461F34438BD760667B1B71AD" ma:contentTypeVersion="4" ma:contentTypeDescription="Ein neues Dokument erstellen." ma:contentTypeScope="" ma:versionID="dda07a2cdeb8635aba69db89360b7cb8">
   <xsd:schema xmlns:xsd="http://www.w3.org/2001/XMLSchema" xmlns:xs="http://www.w3.org/2001/XMLSchema" xmlns:p="http://schemas.microsoft.com/office/2006/metadata/properties" xmlns:ns2="a520fe50-23cf-4a2e-8bfc-142b59f95669" xmlns:ns3="eabdc1b4-8c54-4046-afbe-47a7b6cade93" targetNamespace="http://schemas.microsoft.com/office/2006/metadata/properties" ma:root="true" ma:fieldsID="3d43928a1595ae37fd514363e787ba9b" ns2:_="" ns3:_="">
     <xsd:import namespace="a520fe50-23cf-4a2e-8bfc-142b59f95669"/>
@@ -22379,6 +22516,27 @@
 </ct:contentTypeSchema>
 </file>
 
+<file path=customXml/item3.xml><?xml version="1.0" encoding="utf-8"?>
+<p:properties xmlns:p="http://schemas.microsoft.com/office/2006/metadata/properties" xmlns:xsi="http://www.w3.org/2001/XMLSchema-instance" xmlns:pc="http://schemas.microsoft.com/office/infopath/2007/PartnerControls">
+  <documentManagement>
+    <_dlc_DocId xmlns="a520fe50-23cf-4a2e-8bfc-142b59f95669">FFCHKUDXR3DJ-1374514227-86</_dlc_DocId>
+    <_dlc_DocIdUrl xmlns="a520fe50-23cf-4a2e-8bfc-142b59f95669">
+      <Url>https://grenzebach.sharepoint.com/sites/SP-Dokumentencenter-Test-MBE/_layouts/15/DocIdRedir.aspx?ID=FFCHKUDXR3DJ-1374514227-86</Url>
+      <Description>FFCHKUDXR3DJ-1374514227-86</Description>
+    </_dlc_DocIdUrl>
+  </documentManagement>
+</p:properties>
+</file>
+
+<file path=customXml/item4.xml><?xml version="1.0" encoding="utf-8"?>
+<?mso-contentType ?>
+<FormTemplates xmlns="http://schemas.microsoft.com/sharepoint/v3/contenttype/forms">
+  <Display>DocumentLibraryForm</Display>
+  <Edit>DocumentLibraryForm</Edit>
+  <New>DocumentLibraryForm</New>
+</FormTemplates>
+</file>
+
 <file path=customXml/itemProps1.xml><?xml version="1.0" encoding="utf-8"?>
 <ds:datastoreItem xmlns:ds="http://schemas.openxmlformats.org/officeDocument/2006/customXml" ds:itemID="{F84D983F-044D-4A64-A272-87E935D94DFF}">
   <ds:schemaRefs>
@@ -22388,9 +22546,20 @@
 </file>
 
 <file path=customXml/itemProps2.xml><?xml version="1.0" encoding="utf-8"?>
-<ds:datastoreItem xmlns:ds="http://schemas.openxmlformats.org/officeDocument/2006/customXml" ds:itemID="{8092A37D-6846-4597-A05A-38F35DFC1916}">
+<ds:datastoreItem xmlns:ds="http://schemas.openxmlformats.org/officeDocument/2006/customXml" ds:itemID="{809A5B21-3145-4A94-B8CA-880D7B5BC84A}">
   <ds:schemaRefs>
-    <ds:schemaRef ds:uri="http://schemas.microsoft.com/sharepoint/v3/contenttype/forms"/>
+    <ds:schemaRef ds:uri="http://schemas.microsoft.com/office/2006/metadata/contentType"/>
+    <ds:schemaRef ds:uri="http://schemas.microsoft.com/office/2006/metadata/properties/metaAttributes"/>
+    <ds:schemaRef ds:uri="http://www.w3.org/2001/XMLSchema"/>
+    <ds:schemaRef ds:uri="http://schemas.microsoft.com/office/2006/metadata/properties"/>
+    <ds:schemaRef ds:uri="a520fe50-23cf-4a2e-8bfc-142b59f95669"/>
+    <ds:schemaRef ds:uri="eabdc1b4-8c54-4046-afbe-47a7b6cade93"/>
+    <ds:schemaRef ds:uri="http://schemas.microsoft.com/office/2006/documentManagement/types"/>
+    <ds:schemaRef ds:uri="http://schemas.microsoft.com/office/infopath/2007/PartnerControls"/>
+    <ds:schemaRef ds:uri="http://schemas.openxmlformats.org/package/2006/metadata/core-properties"/>
+    <ds:schemaRef ds:uri="http://purl.org/dc/elements/1.1/"/>
+    <ds:schemaRef ds:uri="http://purl.org/dc/terms/"/>
+    <ds:schemaRef ds:uri="http://schemas.microsoft.com/internal/obd"/>
   </ds:schemaRefs>
 </ds:datastoreItem>
 </file>
@@ -22413,20 +22582,9 @@
 </file>
 
 <file path=customXml/itemProps4.xml><?xml version="1.0" encoding="utf-8"?>
-<ds:datastoreItem xmlns:ds="http://schemas.openxmlformats.org/officeDocument/2006/customXml" ds:itemID="{809A5B21-3145-4A94-B8CA-880D7B5BC84A}">
+<ds:datastoreItem xmlns:ds="http://schemas.openxmlformats.org/officeDocument/2006/customXml" ds:itemID="{8092A37D-6846-4597-A05A-38F35DFC1916}">
   <ds:schemaRefs>
-    <ds:schemaRef ds:uri="http://schemas.microsoft.com/office/2006/metadata/contentType"/>
-    <ds:schemaRef ds:uri="http://schemas.microsoft.com/office/2006/metadata/properties/metaAttributes"/>
-    <ds:schemaRef ds:uri="http://www.w3.org/2001/XMLSchema"/>
-    <ds:schemaRef ds:uri="http://schemas.microsoft.com/office/2006/metadata/properties"/>
-    <ds:schemaRef ds:uri="a520fe50-23cf-4a2e-8bfc-142b59f95669"/>
-    <ds:schemaRef ds:uri="eabdc1b4-8c54-4046-afbe-47a7b6cade93"/>
-    <ds:schemaRef ds:uri="http://schemas.microsoft.com/office/2006/documentManagement/types"/>
-    <ds:schemaRef ds:uri="http://schemas.microsoft.com/office/infopath/2007/PartnerControls"/>
-    <ds:schemaRef ds:uri="http://schemas.openxmlformats.org/package/2006/metadata/core-properties"/>
-    <ds:schemaRef ds:uri="http://purl.org/dc/elements/1.1/"/>
-    <ds:schemaRef ds:uri="http://purl.org/dc/terms/"/>
-    <ds:schemaRef ds:uri="http://schemas.microsoft.com/internal/obd"/>
+    <ds:schemaRef ds:uri="http://schemas.microsoft.com/sharepoint/v3/contenttype/forms"/>
   </ds:schemaRefs>
 </ds:datastoreItem>
 </file>